--- a/Slides/IntroMATLAB_slides.pptx
+++ b/Slides/IntroMATLAB_slides.pptx
@@ -11,8 +11,8 @@
     <p:sldId id="316" r:id="rId2"/>
     <p:sldId id="353" r:id="rId3"/>
     <p:sldId id="258" r:id="rId4"/>
-    <p:sldId id="359" r:id="rId5"/>
-    <p:sldId id="361" r:id="rId6"/>
+    <p:sldId id="361" r:id="rId5"/>
+    <p:sldId id="359" r:id="rId6"/>
     <p:sldId id="360" r:id="rId7"/>
     <p:sldId id="362" r:id="rId8"/>
     <p:sldId id="363" r:id="rId9"/>
@@ -1675,7 +1675,7 @@
           <a:p>
             <a:fld id="{217E5156-1B5D-054E-B5B2-E1B1BA160252}" type="datetimeFigureOut">
               <a:rPr lang="fr-FR" smtClean="0"/>
-              <a:t>17/02/2025</a:t>
+              <a:t>19/02/2026</a:t>
             </a:fld>
             <a:endParaRPr lang="fr-FR"/>
           </a:p>
@@ -2072,7 +2072,7 @@
           <a:p>
             <a:fld id="{DACBD60B-517C-4242-AE46-E1BD2D086542}" type="slidenum">
               <a:rPr lang="fr-FR" smtClean="0"/>
-              <a:t>5</a:t>
+              <a:t>4</a:t>
             </a:fld>
             <a:endParaRPr lang="fr-FR"/>
           </a:p>
@@ -4435,8 +4435,8 @@
         </p:nvSpPr>
         <p:spPr>
           <a:xfrm>
-            <a:off x="165136" y="5830349"/>
-            <a:ext cx="3973037" cy="369332"/>
+            <a:off x="165136" y="5513988"/>
+            <a:ext cx="3973037" cy="646459"/>
           </a:xfrm>
           <a:prstGeom prst="rect">
             <a:avLst/>
@@ -4454,6 +4454,14 @@
                 <a:latin typeface="Helvetica Light"/>
               </a:rPr>
               <a:t>Workshop Lead: Julia Forestell</a:t>
+            </a:r>
+          </a:p>
+          <a:p>
+            <a:r>
+              <a:rPr lang="en-CA" sz="1800" dirty="0">
+                <a:latin typeface="Helvetica Light"/>
+              </a:rPr>
+              <a:t>Facilitator: Megan Ng</a:t>
             </a:r>
             <a:endParaRPr lang="en-CA" dirty="0">
               <a:latin typeface="Helvetica Light"/>
@@ -4493,19 +4501,19 @@
               <a:rPr lang="en-CA" sz="1800" dirty="0">
                 <a:latin typeface="Helvetica Light"/>
               </a:rPr>
-              <a:t>Date: February 18</a:t>
+              <a:t>Date: February 23</a:t>
             </a:r>
             <a:r>
               <a:rPr lang="en-CA" sz="1800" baseline="30000" dirty="0">
                 <a:latin typeface="Helvetica Light"/>
               </a:rPr>
-              <a:t>th</a:t>
+              <a:t>rd</a:t>
             </a:r>
             <a:r>
               <a:rPr lang="en-CA" sz="1800" dirty="0">
                 <a:latin typeface="Helvetica Light"/>
               </a:rPr>
-              <a:t>, 2025</a:t>
+              <a:t>, 2026</a:t>
             </a:r>
             <a:endParaRPr lang="en-CA" sz="1800" dirty="0">
               <a:latin typeface="Helvetica Light" panose="020B0403020202020204" pitchFamily="34" charset="0"/>
@@ -6213,7 +6221,7 @@
         </p:nvSpPr>
         <p:spPr>
           <a:xfrm>
-            <a:off x="540553" y="5081109"/>
+            <a:off x="3453846" y="5134887"/>
             <a:ext cx="2236304" cy="830997"/>
           </a:xfrm>
           <a:prstGeom prst="rect">
@@ -6229,20 +6237,20 @@
           <a:p>
             <a:pPr marL="9525" lvl="1" algn="ctr"/>
             <a:r>
-              <a:rPr lang="en-CA" sz="1600">
+              <a:rPr lang="en-CA" sz="1600" dirty="0">
                 <a:latin typeface="Helvetica" pitchFamily="2" charset="0"/>
               </a:rPr>
-              <a:t>Scan the QR code to confirm you attended today’s workshop.</a:t>
+              <a:t>Scan the QR code to fill out the feedback form!</a:t>
             </a:r>
           </a:p>
         </p:txBody>
       </p:sp>
       <p:sp>
         <p:nvSpPr>
-          <p:cNvPr id="6" name="TextBox 5">
+          <p:cNvPr id="13" name="TextBox 12">
             <a:extLst>
               <a:ext uri="{FF2B5EF4-FFF2-40B4-BE49-F238E27FC236}">
-                <a16:creationId xmlns:a16="http://schemas.microsoft.com/office/drawing/2014/main" id="{B779A3F8-F204-0C4B-8C60-EB9078FAF391}"/>
+                <a16:creationId xmlns:a16="http://schemas.microsoft.com/office/drawing/2014/main" id="{FE22D6A3-531F-3D5A-6D3C-4B4150FC4D1B}"/>
               </a:ext>
             </a:extLst>
           </p:cNvPr>
@@ -6251,8 +6259,8 @@
         </p:nvSpPr>
         <p:spPr>
           <a:xfrm>
-            <a:off x="3555521" y="5087164"/>
-            <a:ext cx="1866473" cy="830997"/>
+            <a:off x="2299063" y="3257333"/>
+            <a:ext cx="4598124" cy="369460"/>
           </a:xfrm>
           <a:prstGeom prst="rect">
             <a:avLst/>
@@ -6265,22 +6273,16 @@
           </a:bodyPr>
           <a:lstStyle/>
           <a:p>
-            <a:pPr algn="ctr"/>
-            <a:r>
-              <a:rPr lang="en-CA" sz="1600">
-                <a:latin typeface="Helvetica" pitchFamily="2" charset="0"/>
-              </a:rPr>
-              <a:t>Fill out the feedback survey in the next 72h. </a:t>
-            </a:r>
+            <a:endParaRPr lang="en-CA" dirty="0"/>
           </a:p>
         </p:txBody>
       </p:sp>
       <p:sp>
         <p:nvSpPr>
-          <p:cNvPr id="7" name="TextBox 6">
+          <p:cNvPr id="16" name="TextBox 15">
             <a:extLst>
               <a:ext uri="{FF2B5EF4-FFF2-40B4-BE49-F238E27FC236}">
-                <a16:creationId xmlns:a16="http://schemas.microsoft.com/office/drawing/2014/main" id="{5B857086-E9A2-1558-824A-80776B62AF2C}"/>
+                <a16:creationId xmlns:a16="http://schemas.microsoft.com/office/drawing/2014/main" id="{D6A8A04A-5D4A-BFD9-6F9D-EC589B98F4B3}"/>
               </a:ext>
             </a:extLst>
           </p:cNvPr>
@@ -6289,8 +6291,8 @@
         </p:nvSpPr>
         <p:spPr>
           <a:xfrm>
-            <a:off x="5970821" y="5081109"/>
-            <a:ext cx="2695988" cy="830997"/>
+            <a:off x="2299063" y="3257333"/>
+            <a:ext cx="4598124" cy="369460"/>
           </a:xfrm>
           <a:prstGeom prst="rect">
             <a:avLst/>
@@ -6303,212 +6305,16 @@
           </a:bodyPr>
           <a:lstStyle/>
           <a:p>
-            <a:pPr algn="ctr"/>
-            <a:r>
-              <a:rPr lang="en-CA" sz="1600">
-                <a:latin typeface="Helvetica" pitchFamily="2" charset="0"/>
-              </a:rPr>
-              <a:t>Get recognition for this workshop on your </a:t>
-            </a:r>
-          </a:p>
-          <a:p>
-            <a:pPr algn="ctr"/>
-            <a:r>
-              <a:rPr lang="en-CA" sz="1600">
-                <a:latin typeface="Helvetica" pitchFamily="2" charset="0"/>
-              </a:rPr>
-              <a:t>co-curricular record. </a:t>
-            </a:r>
-          </a:p>
-        </p:txBody>
-      </p:sp>
-      <p:sp>
-        <p:nvSpPr>
-          <p:cNvPr id="10" name="Oval 9">
-            <a:extLst>
-              <a:ext uri="{FF2B5EF4-FFF2-40B4-BE49-F238E27FC236}">
-                <a16:creationId xmlns:a16="http://schemas.microsoft.com/office/drawing/2014/main" id="{41CD90ED-F12C-DA32-1A84-EF0356FB7921}"/>
-              </a:ext>
-            </a:extLst>
-          </p:cNvPr>
-          <p:cNvSpPr>
-            <a:spLocks noChangeAspect="1"/>
-          </p:cNvSpPr>
-          <p:nvPr/>
-        </p:nvSpPr>
-        <p:spPr>
-          <a:xfrm>
-            <a:off x="1298705" y="1853639"/>
-            <a:ext cx="720000" cy="686283"/>
-          </a:xfrm>
-          <a:prstGeom prst="ellipse">
-            <a:avLst/>
-          </a:prstGeom>
-          <a:solidFill>
-            <a:srgbClr val="13A89E">
-              <a:alpha val="49412"/>
-            </a:srgbClr>
-          </a:solidFill>
-          <a:ln>
-            <a:noFill/>
-          </a:ln>
-        </p:spPr>
-        <p:style>
-          <a:lnRef idx="2">
-            <a:schemeClr val="accent1">
-              <a:shade val="15000"/>
-            </a:schemeClr>
-          </a:lnRef>
-          <a:fillRef idx="1">
-            <a:schemeClr val="accent1"/>
-          </a:fillRef>
-          <a:effectRef idx="0">
-            <a:schemeClr val="accent1"/>
-          </a:effectRef>
-          <a:fontRef idx="minor">
-            <a:schemeClr val="lt1"/>
-          </a:fontRef>
-        </p:style>
-        <p:txBody>
-          <a:bodyPr rtlCol="0" anchor="ctr"/>
-          <a:lstStyle/>
-          <a:p>
-            <a:pPr algn="ctr"/>
-            <a:r>
-              <a:rPr lang="en-US">
-                <a:latin typeface="Helvetica" pitchFamily="2" charset="0"/>
-              </a:rPr>
-              <a:t>1</a:t>
-            </a:r>
-          </a:p>
-        </p:txBody>
-      </p:sp>
-      <p:sp>
-        <p:nvSpPr>
-          <p:cNvPr id="11" name="Oval 10">
-            <a:extLst>
-              <a:ext uri="{FF2B5EF4-FFF2-40B4-BE49-F238E27FC236}">
-                <a16:creationId xmlns:a16="http://schemas.microsoft.com/office/drawing/2014/main" id="{1B79FEFC-04D4-EE23-8047-B09F61F389B0}"/>
-              </a:ext>
-            </a:extLst>
-          </p:cNvPr>
-          <p:cNvSpPr>
-            <a:spLocks noChangeAspect="1"/>
-          </p:cNvSpPr>
-          <p:nvPr/>
-        </p:nvSpPr>
-        <p:spPr>
-          <a:xfrm>
-            <a:off x="4128760" y="1853639"/>
-            <a:ext cx="720000" cy="686283"/>
-          </a:xfrm>
-          <a:prstGeom prst="ellipse">
-            <a:avLst/>
-          </a:prstGeom>
-          <a:solidFill>
-            <a:srgbClr val="13A89E">
-              <a:alpha val="74902"/>
-            </a:srgbClr>
-          </a:solidFill>
-          <a:ln>
-            <a:noFill/>
-          </a:ln>
-        </p:spPr>
-        <p:style>
-          <a:lnRef idx="2">
-            <a:schemeClr val="accent1">
-              <a:shade val="15000"/>
-            </a:schemeClr>
-          </a:lnRef>
-          <a:fillRef idx="1">
-            <a:schemeClr val="accent1"/>
-          </a:fillRef>
-          <a:effectRef idx="0">
-            <a:schemeClr val="accent1"/>
-          </a:effectRef>
-          <a:fontRef idx="minor">
-            <a:schemeClr val="lt1"/>
-          </a:fontRef>
-        </p:style>
-        <p:txBody>
-          <a:bodyPr rtlCol="0" anchor="ctr"/>
-          <a:lstStyle/>
-          <a:p>
-            <a:pPr algn="ctr"/>
-            <a:r>
-              <a:rPr lang="en-US">
-                <a:latin typeface="Helvetica" pitchFamily="2" charset="0"/>
-              </a:rPr>
-              <a:t>2</a:t>
-            </a:r>
-          </a:p>
-        </p:txBody>
-      </p:sp>
-      <p:sp>
-        <p:nvSpPr>
-          <p:cNvPr id="12" name="Oval 11">
-            <a:extLst>
-              <a:ext uri="{FF2B5EF4-FFF2-40B4-BE49-F238E27FC236}">
-                <a16:creationId xmlns:a16="http://schemas.microsoft.com/office/drawing/2014/main" id="{B755A2CE-36C7-7C3A-E3EF-94EBD356F86C}"/>
-              </a:ext>
-            </a:extLst>
-          </p:cNvPr>
-          <p:cNvSpPr>
-            <a:spLocks noChangeAspect="1"/>
-          </p:cNvSpPr>
-          <p:nvPr/>
-        </p:nvSpPr>
-        <p:spPr>
-          <a:xfrm>
-            <a:off x="6958815" y="1837130"/>
-            <a:ext cx="720000" cy="686283"/>
-          </a:xfrm>
-          <a:prstGeom prst="ellipse">
-            <a:avLst/>
-          </a:prstGeom>
-          <a:solidFill>
-            <a:srgbClr val="13A89E"/>
-          </a:solidFill>
-          <a:ln>
-            <a:noFill/>
-          </a:ln>
-        </p:spPr>
-        <p:style>
-          <a:lnRef idx="2">
-            <a:schemeClr val="accent1">
-              <a:shade val="15000"/>
-            </a:schemeClr>
-          </a:lnRef>
-          <a:fillRef idx="1">
-            <a:schemeClr val="accent1"/>
-          </a:fillRef>
-          <a:effectRef idx="0">
-            <a:schemeClr val="accent1"/>
-          </a:effectRef>
-          <a:fontRef idx="minor">
-            <a:schemeClr val="lt1"/>
-          </a:fontRef>
-        </p:style>
-        <p:txBody>
-          <a:bodyPr rtlCol="0" anchor="ctr"/>
-          <a:lstStyle/>
-          <a:p>
-            <a:pPr algn="ctr"/>
-            <a:r>
-              <a:rPr lang="en-US">
-                <a:latin typeface="Helvetica" pitchFamily="2" charset="0"/>
-              </a:rPr>
-              <a:t>3</a:t>
-            </a:r>
+            <a:endParaRPr lang="en-CA" dirty="0"/>
           </a:p>
         </p:txBody>
       </p:sp>
       <p:pic>
         <p:nvPicPr>
-          <p:cNvPr id="14" name="Graphic 13" descr="Clipboard with solid fill">
+          <p:cNvPr id="18" name="Picture 17" descr="A qr code with a few squares&#10;&#10;AI-generated content may be incorrect.">
             <a:extLst>
               <a:ext uri="{FF2B5EF4-FFF2-40B4-BE49-F238E27FC236}">
-                <a16:creationId xmlns:a16="http://schemas.microsoft.com/office/drawing/2014/main" id="{060FE140-39DA-6155-D659-8C3C8FEDECAE}"/>
+                <a16:creationId xmlns:a16="http://schemas.microsoft.com/office/drawing/2014/main" id="{A10F2D47-BE73-380A-BB67-2501BD97E370}"/>
               </a:ext>
             </a:extLst>
           </p:cNvPr>
@@ -6518,98 +6324,15 @@
           <p:nvPr/>
         </p:nvPicPr>
         <p:blipFill>
-          <a:blip r:embed="rId2">
-            <a:extLst>
-              <a:ext uri="{96DAC541-7B7A-43D3-8B79-37D633B846F1}">
-                <asvg:svgBlip xmlns:asvg="http://schemas.microsoft.com/office/drawing/2016/SVG/main" r:embed="rId3"/>
-              </a:ext>
-            </a:extLst>
-          </a:blip>
+          <a:blip r:embed="rId2"/>
           <a:stretch>
             <a:fillRect/>
           </a:stretch>
         </p:blipFill>
         <p:spPr>
           <a:xfrm>
-            <a:off x="3555521" y="2880306"/>
-            <a:ext cx="1866473" cy="1866473"/>
-          </a:xfrm>
-          <a:prstGeom prst="rect">
-            <a:avLst/>
-          </a:prstGeom>
-        </p:spPr>
-      </p:pic>
-      <p:pic>
-        <p:nvPicPr>
-          <p:cNvPr id="1026" name="Picture 2" descr="Co-curricular record approval logo">
-            <a:extLst>
-              <a:ext uri="{FF2B5EF4-FFF2-40B4-BE49-F238E27FC236}">
-                <a16:creationId xmlns:a16="http://schemas.microsoft.com/office/drawing/2014/main" id="{B21C3CDD-B849-1F66-A5B6-38B78BCAB0B1}"/>
-              </a:ext>
-            </a:extLst>
-          </p:cNvPr>
-          <p:cNvPicPr>
-            <a:picLocks noChangeAspect="1" noChangeArrowheads="1"/>
-          </p:cNvPicPr>
-          <p:nvPr/>
-        </p:nvPicPr>
-        <p:blipFill>
-          <a:blip r:embed="rId4">
-            <a:extLst>
-              <a:ext uri="{28A0092B-C50C-407E-A947-70E740481C1C}">
-                <a14:useLocalDpi xmlns:a14="http://schemas.microsoft.com/office/drawing/2010/main" val="0"/>
-              </a:ext>
-            </a:extLst>
-          </a:blip>
-          <a:srcRect/>
-          <a:stretch>
-            <a:fillRect/>
-          </a:stretch>
-        </p:blipFill>
-        <p:spPr bwMode="auto">
-          <a:xfrm>
-            <a:off x="6302815" y="3051542"/>
-            <a:ext cx="2032000" cy="1524000"/>
-          </a:xfrm>
-          <a:prstGeom prst="rect">
-            <a:avLst/>
-          </a:prstGeom>
-          <a:noFill/>
-          <a:extLst>
-            <a:ext uri="{909E8E84-426E-40DD-AFC4-6F175D3DCCD1}">
-              <a14:hiddenFill xmlns:a14="http://schemas.microsoft.com/office/drawing/2010/main">
-                <a:solidFill>
-                  <a:srgbClr val="FFFFFF"/>
-                </a:solidFill>
-              </a14:hiddenFill>
-            </a:ext>
-          </a:extLst>
-        </p:spPr>
-      </p:pic>
-      <p:pic>
-        <p:nvPicPr>
-          <p:cNvPr id="8" name="Picture 7" descr="A qr code with a few squares&#10;&#10;AI-generated content may be incorrect.">
-            <a:extLst>
-              <a:ext uri="{FF2B5EF4-FFF2-40B4-BE49-F238E27FC236}">
-                <a16:creationId xmlns:a16="http://schemas.microsoft.com/office/drawing/2014/main" id="{37A4B85E-B58B-C749-6E9F-91A59BA6F447}"/>
-              </a:ext>
-            </a:extLst>
-          </p:cNvPr>
-          <p:cNvPicPr>
-            <a:picLocks noChangeAspect="1"/>
-          </p:cNvPicPr>
-          <p:nvPr/>
-        </p:nvPicPr>
-        <p:blipFill>
-          <a:blip r:embed="rId5"/>
-          <a:stretch>
-            <a:fillRect/>
-          </a:stretch>
-        </p:blipFill>
-        <p:spPr>
-          <a:xfrm>
-            <a:off x="498653" y="2671413"/>
-            <a:ext cx="2278204" cy="2278204"/>
+            <a:off x="2765438" y="1605478"/>
+            <a:ext cx="3613121" cy="3303710"/>
           </a:xfrm>
           <a:prstGeom prst="rect">
             <a:avLst/>
@@ -7780,17 +7503,65 @@
           <a:p>
             <a:r>
               <a:rPr lang="en-US" dirty="0"/>
-              <a:t>MATLAB Scripts</a:t>
+              <a:t>Command line</a:t>
             </a:r>
           </a:p>
         </p:txBody>
       </p:sp>
       <p:sp>
         <p:nvSpPr>
-          <p:cNvPr id="13" name="TextBox 12">
+          <p:cNvPr id="3" name="Content Placeholder 2">
             <a:extLst>
               <a:ext uri="{FF2B5EF4-FFF2-40B4-BE49-F238E27FC236}">
-                <a16:creationId xmlns:a16="http://schemas.microsoft.com/office/drawing/2014/main" id="{EF849EFD-7A03-2B76-D400-A35518252450}"/>
+                <a16:creationId xmlns:a16="http://schemas.microsoft.com/office/drawing/2014/main" id="{2E76679A-860D-ADB4-13E2-42A97ED709E5}"/>
+              </a:ext>
+            </a:extLst>
+          </p:cNvPr>
+          <p:cNvSpPr>
+            <a:spLocks noGrp="1"/>
+          </p:cNvSpPr>
+          <p:nvPr>
+            <p:ph idx="1"/>
+          </p:nvPr>
+        </p:nvSpPr>
+        <p:spPr>
+          <a:xfrm>
+            <a:off x="628650" y="1593670"/>
+            <a:ext cx="7886700" cy="2390502"/>
+          </a:xfrm>
+        </p:spPr>
+        <p:txBody>
+          <a:bodyPr/>
+          <a:lstStyle/>
+          <a:p>
+            <a:r>
+              <a:rPr lang="en-US" dirty="0"/>
+              <a:t>Runs the statement immediately</a:t>
+            </a:r>
+          </a:p>
+          <a:p>
+            <a:r>
+              <a:rPr lang="en-US" dirty="0"/>
+              <a:t>Use for immediate execution of simple statements (e.g. testing, exploration)</a:t>
+            </a:r>
+          </a:p>
+          <a:p>
+            <a:r>
+              <a:rPr lang="en-US" dirty="0"/>
+              <a:t>Fancy calculator</a:t>
+            </a:r>
+          </a:p>
+          <a:p>
+            <a:endParaRPr lang="en-US" dirty="0"/>
+          </a:p>
+        </p:txBody>
+      </p:sp>
+      <p:sp>
+        <p:nvSpPr>
+          <p:cNvPr id="5" name="TextBox 4">
+            <a:extLst>
+              <a:ext uri="{FF2B5EF4-FFF2-40B4-BE49-F238E27FC236}">
+                <a16:creationId xmlns:a16="http://schemas.microsoft.com/office/drawing/2014/main" id="{0CB1D8F5-5298-7732-CA3D-21E3F7AE9497}"/>
               </a:ext>
             </a:extLst>
           </p:cNvPr>
@@ -7820,132 +7591,269 @@
           </a:p>
         </p:txBody>
       </p:sp>
-      <p:pic>
-        <p:nvPicPr>
-          <p:cNvPr id="5" name="Picture 4">
+      <p:sp>
+        <p:nvSpPr>
+          <p:cNvPr id="8" name="Title 1">
             <a:extLst>
               <a:ext uri="{FF2B5EF4-FFF2-40B4-BE49-F238E27FC236}">
-                <a16:creationId xmlns:a16="http://schemas.microsoft.com/office/drawing/2014/main" id="{B8EFA770-802A-DEC1-053F-F8559A62CDEC}"/>
+                <a16:creationId xmlns:a16="http://schemas.microsoft.com/office/drawing/2014/main" id="{B0A6153C-6C75-38C7-2EBD-A80EF63BBCCE}"/>
               </a:ext>
             </a:extLst>
           </p:cNvPr>
-          <p:cNvPicPr>
-            <a:picLocks noChangeAspect="1"/>
-          </p:cNvPicPr>
+          <p:cNvSpPr txBox="1">
+            <a:spLocks/>
+          </p:cNvSpPr>
           <p:nvPr/>
-        </p:nvPicPr>
-        <p:blipFill>
-          <a:blip r:embed="rId2"/>
-          <a:stretch>
-            <a:fillRect/>
-          </a:stretch>
-        </p:blipFill>
+        </p:nvSpPr>
         <p:spPr>
           <a:xfrm>
-            <a:off x="243635" y="1385720"/>
-            <a:ext cx="5320186" cy="3907179"/>
+            <a:off x="628650" y="3429000"/>
+            <a:ext cx="7886700" cy="1325565"/>
           </a:xfrm>
           <a:prstGeom prst="rect">
             <a:avLst/>
           </a:prstGeom>
         </p:spPr>
-      </p:pic>
+        <p:txBody>
+          <a:bodyPr vert="horz" lIns="91440" tIns="45720" rIns="91440" bIns="45720" rtlCol="0" anchor="ctr">
+            <a:normAutofit/>
+          </a:bodyPr>
+          <a:lstStyle>
+            <a:lvl1pPr algn="l" defTabSz="914175" rtl="0" eaLnBrk="1" latinLnBrk="0" hangingPunct="1">
+              <a:lnSpc>
+                <a:spcPct val="90000"/>
+              </a:lnSpc>
+              <a:spcBef>
+                <a:spcPct val="0"/>
+              </a:spcBef>
+              <a:buNone/>
+              <a:defRPr sz="4403" kern="1200">
+                <a:solidFill>
+                  <a:schemeClr val="tx1"/>
+                </a:solidFill>
+                <a:latin typeface="+mj-lt"/>
+                <a:ea typeface="+mj-ea"/>
+                <a:cs typeface="+mj-cs"/>
+              </a:defRPr>
+            </a:lvl1pPr>
+          </a:lstStyle>
+          <a:p>
+            <a:r>
+              <a:rPr lang="en-US" dirty="0"/>
+              <a:t>Scripts</a:t>
+            </a:r>
+          </a:p>
+        </p:txBody>
+      </p:sp>
       <p:sp>
         <p:nvSpPr>
-          <p:cNvPr id="6" name="TextBox 5">
+          <p:cNvPr id="9" name="Content Placeholder 2">
             <a:extLst>
               <a:ext uri="{FF2B5EF4-FFF2-40B4-BE49-F238E27FC236}">
-                <a16:creationId xmlns:a16="http://schemas.microsoft.com/office/drawing/2014/main" id="{04496C18-B024-F7C7-D438-DF8028154EB2}"/>
+                <a16:creationId xmlns:a16="http://schemas.microsoft.com/office/drawing/2014/main" id="{C3A0B476-B92A-2EE5-D1A4-CC84CB507B8B}"/>
               </a:ext>
             </a:extLst>
           </p:cNvPr>
-          <p:cNvSpPr txBox="1"/>
+          <p:cNvSpPr txBox="1">
+            <a:spLocks/>
+          </p:cNvSpPr>
           <p:nvPr/>
         </p:nvSpPr>
         <p:spPr>
           <a:xfrm>
-            <a:off x="2410690" y="1956861"/>
-            <a:ext cx="2003265" cy="369460"/>
-          </a:xfrm>
-          <a:prstGeom prst="rect">
-            <a:avLst/>
-          </a:prstGeom>
-          <a:noFill/>
-        </p:spPr>
-        <p:txBody>
-          <a:bodyPr wrap="square" rtlCol="0">
-            <a:spAutoFit/>
-          </a:bodyPr>
-          <a:lstStyle/>
-          <a:p>
-            <a:r>
-              <a:rPr lang="en-CA" dirty="0"/>
-              <a:t>Script (.m file)</a:t>
-            </a:r>
-          </a:p>
-        </p:txBody>
-      </p:sp>
-      <p:pic>
-        <p:nvPicPr>
-          <p:cNvPr id="3" name="Picture 2">
-            <a:extLst>
-              <a:ext uri="{FF2B5EF4-FFF2-40B4-BE49-F238E27FC236}">
-                <a16:creationId xmlns:a16="http://schemas.microsoft.com/office/drawing/2014/main" id="{E063262D-17CC-A5B9-F314-718411390A48}"/>
-              </a:ext>
-            </a:extLst>
-          </p:cNvPr>
-          <p:cNvPicPr>
-            <a:picLocks noChangeAspect="1"/>
-          </p:cNvPicPr>
-          <p:nvPr/>
-        </p:nvPicPr>
-        <p:blipFill>
-          <a:blip r:embed="rId3"/>
-          <a:stretch>
-            <a:fillRect/>
-          </a:stretch>
-        </p:blipFill>
-        <p:spPr>
-          <a:xfrm>
-            <a:off x="2903728" y="2933835"/>
-            <a:ext cx="5488739" cy="3195690"/>
+            <a:off x="628650" y="4410873"/>
+            <a:ext cx="7886700" cy="2082004"/>
           </a:xfrm>
           <a:prstGeom prst="rect">
             <a:avLst/>
           </a:prstGeom>
         </p:spPr>
-      </p:pic>
-      <p:sp>
-        <p:nvSpPr>
-          <p:cNvPr id="7" name="TextBox 6">
-            <a:extLst>
-              <a:ext uri="{FF2B5EF4-FFF2-40B4-BE49-F238E27FC236}">
-                <a16:creationId xmlns:a16="http://schemas.microsoft.com/office/drawing/2014/main" id="{91EE0289-AC08-3CC1-3097-37811714EB0C}"/>
-              </a:ext>
-            </a:extLst>
-          </p:cNvPr>
-          <p:cNvSpPr txBox="1"/>
-          <p:nvPr/>
-        </p:nvSpPr>
-        <p:spPr>
-          <a:xfrm>
-            <a:off x="5350409" y="3857478"/>
-            <a:ext cx="2110589" cy="369460"/>
-          </a:xfrm>
-          <a:prstGeom prst="rect">
-            <a:avLst/>
-          </a:prstGeom>
-          <a:noFill/>
-        </p:spPr>
         <p:txBody>
-          <a:bodyPr wrap="square" rtlCol="0">
-            <a:spAutoFit/>
+          <a:bodyPr vert="horz" lIns="91440" tIns="45720" rIns="91440" bIns="45720" rtlCol="0">
+            <a:normAutofit/>
           </a:bodyPr>
-          <a:lstStyle/>
-          <a:p>
-            <a:r>
-              <a:rPr lang="en-CA" dirty="0"/>
-              <a:t>Live Script (.mlx file)</a:t>
+          <a:lstStyle>
+            <a:lvl1pPr marL="228540" indent="-228540" algn="l" defTabSz="914175" rtl="0" eaLnBrk="1" latinLnBrk="0" hangingPunct="1">
+              <a:lnSpc>
+                <a:spcPct val="90000"/>
+              </a:lnSpc>
+              <a:spcBef>
+                <a:spcPts val="998"/>
+              </a:spcBef>
+              <a:buFont typeface="Arial" panose="020B0604020202020204" pitchFamily="34" charset="0"/>
+              <a:buChar char="•"/>
+              <a:defRPr sz="2798" kern="1200">
+                <a:solidFill>
+                  <a:schemeClr val="tx1"/>
+                </a:solidFill>
+                <a:latin typeface="+mn-lt"/>
+                <a:ea typeface="+mn-ea"/>
+                <a:cs typeface="+mn-cs"/>
+              </a:defRPr>
+            </a:lvl1pPr>
+            <a:lvl2pPr marL="685628" indent="-228540" algn="l" defTabSz="914175" rtl="0" eaLnBrk="1" latinLnBrk="0" hangingPunct="1">
+              <a:lnSpc>
+                <a:spcPct val="90000"/>
+              </a:lnSpc>
+              <a:spcBef>
+                <a:spcPts val="503"/>
+              </a:spcBef>
+              <a:buFont typeface="Arial" panose="020B0604020202020204" pitchFamily="34" charset="0"/>
+              <a:buChar char="•"/>
+              <a:defRPr sz="2400" kern="1200">
+                <a:solidFill>
+                  <a:schemeClr val="tx1"/>
+                </a:solidFill>
+                <a:latin typeface="+mn-lt"/>
+                <a:ea typeface="+mn-ea"/>
+                <a:cs typeface="+mn-cs"/>
+              </a:defRPr>
+            </a:lvl2pPr>
+            <a:lvl3pPr marL="1142715" indent="-228540" algn="l" defTabSz="914175" rtl="0" eaLnBrk="1" latinLnBrk="0" hangingPunct="1">
+              <a:lnSpc>
+                <a:spcPct val="90000"/>
+              </a:lnSpc>
+              <a:spcBef>
+                <a:spcPts val="503"/>
+              </a:spcBef>
+              <a:buFont typeface="Arial" panose="020B0604020202020204" pitchFamily="34" charset="0"/>
+              <a:buChar char="•"/>
+              <a:defRPr sz="2002" kern="1200">
+                <a:solidFill>
+                  <a:schemeClr val="tx1"/>
+                </a:solidFill>
+                <a:latin typeface="+mn-lt"/>
+                <a:ea typeface="+mn-ea"/>
+                <a:cs typeface="+mn-cs"/>
+              </a:defRPr>
+            </a:lvl3pPr>
+            <a:lvl4pPr marL="1599803" indent="-228540" algn="l" defTabSz="914175" rtl="0" eaLnBrk="1" latinLnBrk="0" hangingPunct="1">
+              <a:lnSpc>
+                <a:spcPct val="90000"/>
+              </a:lnSpc>
+              <a:spcBef>
+                <a:spcPts val="503"/>
+              </a:spcBef>
+              <a:buFont typeface="Arial" panose="020B0604020202020204" pitchFamily="34" charset="0"/>
+              <a:buChar char="•"/>
+              <a:defRPr sz="1800" kern="1200">
+                <a:solidFill>
+                  <a:schemeClr val="tx1"/>
+                </a:solidFill>
+                <a:latin typeface="+mn-lt"/>
+                <a:ea typeface="+mn-ea"/>
+                <a:cs typeface="+mn-cs"/>
+              </a:defRPr>
+            </a:lvl4pPr>
+            <a:lvl5pPr marL="2056883" indent="-228540" algn="l" defTabSz="914175" rtl="0" eaLnBrk="1" latinLnBrk="0" hangingPunct="1">
+              <a:lnSpc>
+                <a:spcPct val="90000"/>
+              </a:lnSpc>
+              <a:spcBef>
+                <a:spcPts val="503"/>
+              </a:spcBef>
+              <a:buFont typeface="Arial" panose="020B0604020202020204" pitchFamily="34" charset="0"/>
+              <a:buChar char="•"/>
+              <a:defRPr sz="1800" kern="1200">
+                <a:solidFill>
+                  <a:schemeClr val="tx1"/>
+                </a:solidFill>
+                <a:latin typeface="+mn-lt"/>
+                <a:ea typeface="+mn-ea"/>
+                <a:cs typeface="+mn-cs"/>
+              </a:defRPr>
+            </a:lvl5pPr>
+            <a:lvl6pPr marL="2513970" indent="-228540" algn="l" defTabSz="914175" rtl="0" eaLnBrk="1" latinLnBrk="0" hangingPunct="1">
+              <a:lnSpc>
+                <a:spcPct val="90000"/>
+              </a:lnSpc>
+              <a:spcBef>
+                <a:spcPts val="503"/>
+              </a:spcBef>
+              <a:buFont typeface="Arial" panose="020B0604020202020204" pitchFamily="34" charset="0"/>
+              <a:buChar char="•"/>
+              <a:defRPr sz="1800" kern="1200">
+                <a:solidFill>
+                  <a:schemeClr val="tx1"/>
+                </a:solidFill>
+                <a:latin typeface="+mn-lt"/>
+                <a:ea typeface="+mn-ea"/>
+                <a:cs typeface="+mn-cs"/>
+              </a:defRPr>
+            </a:lvl6pPr>
+            <a:lvl7pPr marL="2971058" indent="-228540" algn="l" defTabSz="914175" rtl="0" eaLnBrk="1" latinLnBrk="0" hangingPunct="1">
+              <a:lnSpc>
+                <a:spcPct val="90000"/>
+              </a:lnSpc>
+              <a:spcBef>
+                <a:spcPts val="503"/>
+              </a:spcBef>
+              <a:buFont typeface="Arial" panose="020B0604020202020204" pitchFamily="34" charset="0"/>
+              <a:buChar char="•"/>
+              <a:defRPr sz="1800" kern="1200">
+                <a:solidFill>
+                  <a:schemeClr val="tx1"/>
+                </a:solidFill>
+                <a:latin typeface="+mn-lt"/>
+                <a:ea typeface="+mn-ea"/>
+                <a:cs typeface="+mn-cs"/>
+              </a:defRPr>
+            </a:lvl7pPr>
+            <a:lvl8pPr marL="3428145" indent="-228540" algn="l" defTabSz="914175" rtl="0" eaLnBrk="1" latinLnBrk="0" hangingPunct="1">
+              <a:lnSpc>
+                <a:spcPct val="90000"/>
+              </a:lnSpc>
+              <a:spcBef>
+                <a:spcPts val="503"/>
+              </a:spcBef>
+              <a:buFont typeface="Arial" panose="020B0604020202020204" pitchFamily="34" charset="0"/>
+              <a:buChar char="•"/>
+              <a:defRPr sz="1800" kern="1200">
+                <a:solidFill>
+                  <a:schemeClr val="tx1"/>
+                </a:solidFill>
+                <a:latin typeface="+mn-lt"/>
+                <a:ea typeface="+mn-ea"/>
+                <a:cs typeface="+mn-cs"/>
+              </a:defRPr>
+            </a:lvl8pPr>
+            <a:lvl9pPr marL="3885225" indent="-228540" algn="l" defTabSz="914175" rtl="0" eaLnBrk="1" latinLnBrk="0" hangingPunct="1">
+              <a:lnSpc>
+                <a:spcPct val="90000"/>
+              </a:lnSpc>
+              <a:spcBef>
+                <a:spcPts val="503"/>
+              </a:spcBef>
+              <a:buFont typeface="Arial" panose="020B0604020202020204" pitchFamily="34" charset="0"/>
+              <a:buChar char="•"/>
+              <a:defRPr sz="1800" kern="1200">
+                <a:solidFill>
+                  <a:schemeClr val="tx1"/>
+                </a:solidFill>
+                <a:latin typeface="+mn-lt"/>
+                <a:ea typeface="+mn-ea"/>
+                <a:cs typeface="+mn-cs"/>
+              </a:defRPr>
+            </a:lvl9pPr>
+          </a:lstStyle>
+          <a:p>
+            <a:r>
+              <a:rPr lang="en-US" dirty="0"/>
+              <a:t>A </a:t>
+            </a:r>
+            <a:r>
+              <a:rPr lang="en-US" b="1" dirty="0"/>
+              <a:t>saved</a:t>
+            </a:r>
+            <a:r>
+              <a:rPr lang="en-US" dirty="0"/>
+              <a:t> file of commands</a:t>
+            </a:r>
+          </a:p>
+          <a:p>
+            <a:r>
+              <a:rPr lang="en-US" dirty="0"/>
+              <a:t>Use for automation, functions, debugging, complex tasks</a:t>
             </a:r>
           </a:p>
         </p:txBody>
@@ -7953,7 +7861,7 @@
     </p:spTree>
     <p:extLst>
       <p:ext uri="{BB962C8B-B14F-4D97-AF65-F5344CB8AC3E}">
-        <p14:creationId xmlns:p14="http://schemas.microsoft.com/office/powerpoint/2010/main" val="3237991214"/>
+        <p14:creationId xmlns:p14="http://schemas.microsoft.com/office/powerpoint/2010/main" val="4089815534"/>
       </p:ext>
     </p:extLst>
   </p:cSld>
@@ -8003,51 +7911,173 @@
           <a:p>
             <a:r>
               <a:rPr lang="en-US" dirty="0"/>
-              <a:t>The command line</a:t>
+              <a:t>MATLAB Scripts</a:t>
             </a:r>
           </a:p>
         </p:txBody>
       </p:sp>
       <p:sp>
         <p:nvSpPr>
-          <p:cNvPr id="3" name="Content Placeholder 2">
+          <p:cNvPr id="13" name="TextBox 12">
             <a:extLst>
               <a:ext uri="{FF2B5EF4-FFF2-40B4-BE49-F238E27FC236}">
-                <a16:creationId xmlns:a16="http://schemas.microsoft.com/office/drawing/2014/main" id="{2E76679A-860D-ADB4-13E2-42A97ED709E5}"/>
+                <a16:creationId xmlns:a16="http://schemas.microsoft.com/office/drawing/2014/main" id="{EF849EFD-7A03-2B76-D400-A35518252450}"/>
               </a:ext>
             </a:extLst>
           </p:cNvPr>
-          <p:cNvSpPr>
-            <a:spLocks noGrp="1"/>
-          </p:cNvSpPr>
-          <p:nvPr>
-            <p:ph idx="1"/>
-          </p:nvPr>
+          <p:cNvSpPr txBox="1"/>
+          <p:nvPr/>
         </p:nvSpPr>
-        <p:spPr/>
+        <p:spPr>
+          <a:xfrm>
+            <a:off x="0" y="23931"/>
+            <a:ext cx="2606040" cy="338554"/>
+          </a:xfrm>
+          <a:prstGeom prst="rect">
+            <a:avLst/>
+          </a:prstGeom>
+          <a:noFill/>
+        </p:spPr>
         <p:txBody>
-          <a:bodyPr/>
+          <a:bodyPr wrap="square" rtlCol="0">
+            <a:spAutoFit/>
+          </a:bodyPr>
           <a:lstStyle/>
           <a:p>
             <a:r>
-              <a:rPr lang="en-US" dirty="0"/>
-              <a:t>Using MATLAB as a fancy calculator</a:t>
-            </a:r>
-          </a:p>
-          <a:p>
-            <a:r>
-              <a:rPr lang="en-US" dirty="0"/>
-              <a:t>Vectors, matrices, and arrays</a:t>
-            </a:r>
-          </a:p>
-          <a:p>
-            <a:r>
-              <a:rPr lang="en-US" dirty="0"/>
-              <a:t>Basic built-in functions</a:t>
-            </a:r>
-          </a:p>
-          <a:p>
-            <a:endParaRPr lang="en-US" dirty="0"/>
+              <a:rPr lang="en-CA" sz="1600" i="1" dirty="0"/>
+              <a:t>Module 1: MATLAB Basics</a:t>
+            </a:r>
+          </a:p>
+        </p:txBody>
+      </p:sp>
+      <p:pic>
+        <p:nvPicPr>
+          <p:cNvPr id="5" name="Picture 4">
+            <a:extLst>
+              <a:ext uri="{FF2B5EF4-FFF2-40B4-BE49-F238E27FC236}">
+                <a16:creationId xmlns:a16="http://schemas.microsoft.com/office/drawing/2014/main" id="{B8EFA770-802A-DEC1-053F-F8559A62CDEC}"/>
+              </a:ext>
+            </a:extLst>
+          </p:cNvPr>
+          <p:cNvPicPr>
+            <a:picLocks noChangeAspect="1"/>
+          </p:cNvPicPr>
+          <p:nvPr/>
+        </p:nvPicPr>
+        <p:blipFill>
+          <a:blip r:embed="rId2"/>
+          <a:stretch>
+            <a:fillRect/>
+          </a:stretch>
+        </p:blipFill>
+        <p:spPr>
+          <a:xfrm>
+            <a:off x="243635" y="1385720"/>
+            <a:ext cx="5320186" cy="3907179"/>
+          </a:xfrm>
+          <a:prstGeom prst="rect">
+            <a:avLst/>
+          </a:prstGeom>
+        </p:spPr>
+      </p:pic>
+      <p:sp>
+        <p:nvSpPr>
+          <p:cNvPr id="6" name="TextBox 5">
+            <a:extLst>
+              <a:ext uri="{FF2B5EF4-FFF2-40B4-BE49-F238E27FC236}">
+                <a16:creationId xmlns:a16="http://schemas.microsoft.com/office/drawing/2014/main" id="{04496C18-B024-F7C7-D438-DF8028154EB2}"/>
+              </a:ext>
+            </a:extLst>
+          </p:cNvPr>
+          <p:cNvSpPr txBox="1"/>
+          <p:nvPr/>
+        </p:nvSpPr>
+        <p:spPr>
+          <a:xfrm>
+            <a:off x="2410690" y="1956861"/>
+            <a:ext cx="2003265" cy="369460"/>
+          </a:xfrm>
+          <a:prstGeom prst="rect">
+            <a:avLst/>
+          </a:prstGeom>
+          <a:noFill/>
+        </p:spPr>
+        <p:txBody>
+          <a:bodyPr wrap="square" rtlCol="0">
+            <a:spAutoFit/>
+          </a:bodyPr>
+          <a:lstStyle/>
+          <a:p>
+            <a:r>
+              <a:rPr lang="en-CA" dirty="0"/>
+              <a:t>Script (.m file)</a:t>
+            </a:r>
+          </a:p>
+        </p:txBody>
+      </p:sp>
+      <p:pic>
+        <p:nvPicPr>
+          <p:cNvPr id="3" name="Picture 2">
+            <a:extLst>
+              <a:ext uri="{FF2B5EF4-FFF2-40B4-BE49-F238E27FC236}">
+                <a16:creationId xmlns:a16="http://schemas.microsoft.com/office/drawing/2014/main" id="{E063262D-17CC-A5B9-F314-718411390A48}"/>
+              </a:ext>
+            </a:extLst>
+          </p:cNvPr>
+          <p:cNvPicPr>
+            <a:picLocks noChangeAspect="1"/>
+          </p:cNvPicPr>
+          <p:nvPr/>
+        </p:nvPicPr>
+        <p:blipFill>
+          <a:blip r:embed="rId3"/>
+          <a:stretch>
+            <a:fillRect/>
+          </a:stretch>
+        </p:blipFill>
+        <p:spPr>
+          <a:xfrm>
+            <a:off x="3412322" y="2933835"/>
+            <a:ext cx="5488739" cy="3195690"/>
+          </a:xfrm>
+          <a:prstGeom prst="rect">
+            <a:avLst/>
+          </a:prstGeom>
+        </p:spPr>
+      </p:pic>
+      <p:sp>
+        <p:nvSpPr>
+          <p:cNvPr id="7" name="TextBox 6">
+            <a:extLst>
+              <a:ext uri="{FF2B5EF4-FFF2-40B4-BE49-F238E27FC236}">
+                <a16:creationId xmlns:a16="http://schemas.microsoft.com/office/drawing/2014/main" id="{91EE0289-AC08-3CC1-3097-37811714EB0C}"/>
+              </a:ext>
+            </a:extLst>
+          </p:cNvPr>
+          <p:cNvSpPr txBox="1"/>
+          <p:nvPr/>
+        </p:nvSpPr>
+        <p:spPr>
+          <a:xfrm>
+            <a:off x="5350409" y="3857478"/>
+            <a:ext cx="2110589" cy="369460"/>
+          </a:xfrm>
+          <a:prstGeom prst="rect">
+            <a:avLst/>
+          </a:prstGeom>
+          <a:noFill/>
+        </p:spPr>
+        <p:txBody>
+          <a:bodyPr wrap="square" rtlCol="0">
+            <a:spAutoFit/>
+          </a:bodyPr>
+          <a:lstStyle/>
+          <a:p>
+            <a:r>
+              <a:rPr lang="en-CA" dirty="0"/>
+              <a:t>Live Script (.mlx file)</a:t>
+            </a:r>
           </a:p>
         </p:txBody>
       </p:sp>
@@ -8056,7 +8086,7 @@
           <p:cNvPr id="4" name="Rectangle: Rounded Corners 3">
             <a:extLst>
               <a:ext uri="{FF2B5EF4-FFF2-40B4-BE49-F238E27FC236}">
-                <a16:creationId xmlns:a16="http://schemas.microsoft.com/office/drawing/2014/main" id="{847B61E0-B302-D18B-E5DD-68E222DA58F9}"/>
+                <a16:creationId xmlns:a16="http://schemas.microsoft.com/office/drawing/2014/main" id="{16594A64-1364-E1DB-C205-73ECBA720AA7}"/>
               </a:ext>
             </a:extLst>
           </p:cNvPr>
@@ -8107,75 +8137,10 @@
           </a:p>
         </p:txBody>
       </p:sp>
-      <p:pic>
-        <p:nvPicPr>
-          <p:cNvPr id="6" name="Picture 5" descr="Calculator keypad">
-            <a:extLst>
-              <a:ext uri="{FF2B5EF4-FFF2-40B4-BE49-F238E27FC236}">
-                <a16:creationId xmlns:a16="http://schemas.microsoft.com/office/drawing/2014/main" id="{0398E10F-DE4D-E1FA-95C7-7893C9145D8D}"/>
-              </a:ext>
-            </a:extLst>
-          </p:cNvPr>
-          <p:cNvPicPr>
-            <a:picLocks noChangeAspect="1"/>
-          </p:cNvPicPr>
-          <p:nvPr/>
-        </p:nvPicPr>
-        <p:blipFill>
-          <a:blip r:embed="rId3"/>
-          <a:stretch>
-            <a:fillRect/>
-          </a:stretch>
-        </p:blipFill>
-        <p:spPr>
-          <a:xfrm>
-            <a:off x="3001383" y="4001294"/>
-            <a:ext cx="3141233" cy="1973087"/>
-          </a:xfrm>
-          <a:prstGeom prst="rect">
-            <a:avLst/>
-          </a:prstGeom>
-        </p:spPr>
-      </p:pic>
-      <p:sp>
-        <p:nvSpPr>
-          <p:cNvPr id="5" name="TextBox 4">
-            <a:extLst>
-              <a:ext uri="{FF2B5EF4-FFF2-40B4-BE49-F238E27FC236}">
-                <a16:creationId xmlns:a16="http://schemas.microsoft.com/office/drawing/2014/main" id="{0CB1D8F5-5298-7732-CA3D-21E3F7AE9497}"/>
-              </a:ext>
-            </a:extLst>
-          </p:cNvPr>
-          <p:cNvSpPr txBox="1"/>
-          <p:nvPr/>
-        </p:nvSpPr>
-        <p:spPr>
-          <a:xfrm>
-            <a:off x="0" y="23931"/>
-            <a:ext cx="2606040" cy="338554"/>
-          </a:xfrm>
-          <a:prstGeom prst="rect">
-            <a:avLst/>
-          </a:prstGeom>
-          <a:noFill/>
-        </p:spPr>
-        <p:txBody>
-          <a:bodyPr wrap="square" rtlCol="0">
-            <a:spAutoFit/>
-          </a:bodyPr>
-          <a:lstStyle/>
-          <a:p>
-            <a:r>
-              <a:rPr lang="en-CA" sz="1600" i="1" dirty="0"/>
-              <a:t>Module 1: MATLAB Basics</a:t>
-            </a:r>
-          </a:p>
-        </p:txBody>
-      </p:sp>
     </p:spTree>
     <p:extLst>
       <p:ext uri="{BB962C8B-B14F-4D97-AF65-F5344CB8AC3E}">
-        <p14:creationId xmlns:p14="http://schemas.microsoft.com/office/powerpoint/2010/main" val="4089815534"/>
+        <p14:creationId xmlns:p14="http://schemas.microsoft.com/office/powerpoint/2010/main" val="3237991214"/>
       </p:ext>
     </p:extLst>
   </p:cSld>
@@ -8507,13 +8472,13 @@
           <a:p>
             <a:r>
               <a:rPr lang="en-US" dirty="0"/>
-              <a:t>Basic arithmetic</a:t>
+              <a:t>Variables &amp; indexing</a:t>
             </a:r>
           </a:p>
           <a:p>
             <a:r>
               <a:rPr lang="en-US" dirty="0"/>
-              <a:t>Variables</a:t>
+              <a:t>If-statements &amp; loops</a:t>
             </a:r>
           </a:p>
           <a:p>
@@ -8525,19 +8490,7 @@
           <a:p>
             <a:r>
               <a:rPr lang="en-US" dirty="0"/>
-              <a:t>If-statements and loops</a:t>
-            </a:r>
-          </a:p>
-          <a:p>
-            <a:r>
-              <a:rPr lang="en-US" dirty="0"/>
-              <a:t>Text and characters</a:t>
-            </a:r>
-          </a:p>
-          <a:p>
-            <a:r>
-              <a:rPr lang="en-US" dirty="0"/>
-              <a:t>Basic errors and troubleshooting</a:t>
+              <a:t>MATLAB errors and warnings </a:t>
             </a:r>
           </a:p>
         </p:txBody>
@@ -9144,7 +9097,12 @@
             <p:ph type="title"/>
           </p:nvPr>
         </p:nvSpPr>
-        <p:spPr/>
+        <p:spPr>
+          <a:xfrm>
+            <a:off x="628650" y="2766217"/>
+            <a:ext cx="7886700" cy="1325565"/>
+          </a:xfrm>
+        </p:spPr>
         <p:txBody>
           <a:bodyPr/>
           <a:lstStyle/>
@@ -9159,423 +9117,6 @@
           </a:p>
         </p:txBody>
       </p:sp>
-      <p:sp>
-        <p:nvSpPr>
-          <p:cNvPr id="4" name="TextBox 3">
-            <a:extLst>
-              <a:ext uri="{FF2B5EF4-FFF2-40B4-BE49-F238E27FC236}">
-                <a16:creationId xmlns:a16="http://schemas.microsoft.com/office/drawing/2014/main" id="{C55CD7EF-C880-CBCD-398D-7E3BB5D5062C}"/>
-              </a:ext>
-            </a:extLst>
-          </p:cNvPr>
-          <p:cNvSpPr txBox="1"/>
-          <p:nvPr/>
-        </p:nvSpPr>
-        <p:spPr>
-          <a:xfrm>
-            <a:off x="540553" y="5081109"/>
-            <a:ext cx="2236304" cy="830997"/>
-          </a:xfrm>
-          <a:prstGeom prst="rect">
-            <a:avLst/>
-          </a:prstGeom>
-          <a:noFill/>
-        </p:spPr>
-        <p:txBody>
-          <a:bodyPr wrap="square" rtlCol="0">
-            <a:spAutoFit/>
-          </a:bodyPr>
-          <a:lstStyle/>
-          <a:p>
-            <a:pPr marL="9525" lvl="1" algn="ctr"/>
-            <a:r>
-              <a:rPr lang="en-CA" sz="1600">
-                <a:latin typeface="Helvetica" pitchFamily="2" charset="0"/>
-              </a:rPr>
-              <a:t>Scan the QR code to confirm you attended today’s workshop.</a:t>
-            </a:r>
-          </a:p>
-        </p:txBody>
-      </p:sp>
-      <p:sp>
-        <p:nvSpPr>
-          <p:cNvPr id="6" name="TextBox 5">
-            <a:extLst>
-              <a:ext uri="{FF2B5EF4-FFF2-40B4-BE49-F238E27FC236}">
-                <a16:creationId xmlns:a16="http://schemas.microsoft.com/office/drawing/2014/main" id="{B779A3F8-F204-0C4B-8C60-EB9078FAF391}"/>
-              </a:ext>
-            </a:extLst>
-          </p:cNvPr>
-          <p:cNvSpPr txBox="1"/>
-          <p:nvPr/>
-        </p:nvSpPr>
-        <p:spPr>
-          <a:xfrm>
-            <a:off x="3555521" y="5087164"/>
-            <a:ext cx="1866473" cy="830997"/>
-          </a:xfrm>
-          <a:prstGeom prst="rect">
-            <a:avLst/>
-          </a:prstGeom>
-          <a:noFill/>
-        </p:spPr>
-        <p:txBody>
-          <a:bodyPr wrap="square">
-            <a:spAutoFit/>
-          </a:bodyPr>
-          <a:lstStyle/>
-          <a:p>
-            <a:pPr algn="ctr"/>
-            <a:r>
-              <a:rPr lang="en-CA" sz="1600">
-                <a:latin typeface="Helvetica" pitchFamily="2" charset="0"/>
-              </a:rPr>
-              <a:t>Fill out the feedback survey in the next 72h. </a:t>
-            </a:r>
-          </a:p>
-        </p:txBody>
-      </p:sp>
-      <p:sp>
-        <p:nvSpPr>
-          <p:cNvPr id="7" name="TextBox 6">
-            <a:extLst>
-              <a:ext uri="{FF2B5EF4-FFF2-40B4-BE49-F238E27FC236}">
-                <a16:creationId xmlns:a16="http://schemas.microsoft.com/office/drawing/2014/main" id="{5B857086-E9A2-1558-824A-80776B62AF2C}"/>
-              </a:ext>
-            </a:extLst>
-          </p:cNvPr>
-          <p:cNvSpPr txBox="1"/>
-          <p:nvPr/>
-        </p:nvSpPr>
-        <p:spPr>
-          <a:xfrm>
-            <a:off x="5970821" y="5081109"/>
-            <a:ext cx="2695988" cy="830997"/>
-          </a:xfrm>
-          <a:prstGeom prst="rect">
-            <a:avLst/>
-          </a:prstGeom>
-          <a:noFill/>
-        </p:spPr>
-        <p:txBody>
-          <a:bodyPr wrap="square">
-            <a:spAutoFit/>
-          </a:bodyPr>
-          <a:lstStyle/>
-          <a:p>
-            <a:pPr algn="ctr"/>
-            <a:r>
-              <a:rPr lang="en-CA" sz="1600">
-                <a:latin typeface="Helvetica" pitchFamily="2" charset="0"/>
-              </a:rPr>
-              <a:t>Get recognition for this workshop on your </a:t>
-            </a:r>
-          </a:p>
-          <a:p>
-            <a:pPr algn="ctr"/>
-            <a:r>
-              <a:rPr lang="en-CA" sz="1600">
-                <a:latin typeface="Helvetica" pitchFamily="2" charset="0"/>
-              </a:rPr>
-              <a:t>co-curricular record. </a:t>
-            </a:r>
-          </a:p>
-        </p:txBody>
-      </p:sp>
-      <p:sp>
-        <p:nvSpPr>
-          <p:cNvPr id="10" name="Oval 9">
-            <a:extLst>
-              <a:ext uri="{FF2B5EF4-FFF2-40B4-BE49-F238E27FC236}">
-                <a16:creationId xmlns:a16="http://schemas.microsoft.com/office/drawing/2014/main" id="{41CD90ED-F12C-DA32-1A84-EF0356FB7921}"/>
-              </a:ext>
-            </a:extLst>
-          </p:cNvPr>
-          <p:cNvSpPr>
-            <a:spLocks noChangeAspect="1"/>
-          </p:cNvSpPr>
-          <p:nvPr/>
-        </p:nvSpPr>
-        <p:spPr>
-          <a:xfrm>
-            <a:off x="1298705" y="1853639"/>
-            <a:ext cx="720000" cy="686283"/>
-          </a:xfrm>
-          <a:prstGeom prst="ellipse">
-            <a:avLst/>
-          </a:prstGeom>
-          <a:solidFill>
-            <a:srgbClr val="13A89E">
-              <a:alpha val="49412"/>
-            </a:srgbClr>
-          </a:solidFill>
-          <a:ln>
-            <a:noFill/>
-          </a:ln>
-        </p:spPr>
-        <p:style>
-          <a:lnRef idx="2">
-            <a:schemeClr val="accent1">
-              <a:shade val="15000"/>
-            </a:schemeClr>
-          </a:lnRef>
-          <a:fillRef idx="1">
-            <a:schemeClr val="accent1"/>
-          </a:fillRef>
-          <a:effectRef idx="0">
-            <a:schemeClr val="accent1"/>
-          </a:effectRef>
-          <a:fontRef idx="minor">
-            <a:schemeClr val="lt1"/>
-          </a:fontRef>
-        </p:style>
-        <p:txBody>
-          <a:bodyPr rtlCol="0" anchor="ctr"/>
-          <a:lstStyle/>
-          <a:p>
-            <a:pPr algn="ctr"/>
-            <a:r>
-              <a:rPr lang="en-US">
-                <a:latin typeface="Helvetica" pitchFamily="2" charset="0"/>
-              </a:rPr>
-              <a:t>1</a:t>
-            </a:r>
-          </a:p>
-        </p:txBody>
-      </p:sp>
-      <p:sp>
-        <p:nvSpPr>
-          <p:cNvPr id="11" name="Oval 10">
-            <a:extLst>
-              <a:ext uri="{FF2B5EF4-FFF2-40B4-BE49-F238E27FC236}">
-                <a16:creationId xmlns:a16="http://schemas.microsoft.com/office/drawing/2014/main" id="{1B79FEFC-04D4-EE23-8047-B09F61F389B0}"/>
-              </a:ext>
-            </a:extLst>
-          </p:cNvPr>
-          <p:cNvSpPr>
-            <a:spLocks noChangeAspect="1"/>
-          </p:cNvSpPr>
-          <p:nvPr/>
-        </p:nvSpPr>
-        <p:spPr>
-          <a:xfrm>
-            <a:off x="4128760" y="1853639"/>
-            <a:ext cx="720000" cy="686283"/>
-          </a:xfrm>
-          <a:prstGeom prst="ellipse">
-            <a:avLst/>
-          </a:prstGeom>
-          <a:solidFill>
-            <a:srgbClr val="13A89E">
-              <a:alpha val="74902"/>
-            </a:srgbClr>
-          </a:solidFill>
-          <a:ln>
-            <a:noFill/>
-          </a:ln>
-        </p:spPr>
-        <p:style>
-          <a:lnRef idx="2">
-            <a:schemeClr val="accent1">
-              <a:shade val="15000"/>
-            </a:schemeClr>
-          </a:lnRef>
-          <a:fillRef idx="1">
-            <a:schemeClr val="accent1"/>
-          </a:fillRef>
-          <a:effectRef idx="0">
-            <a:schemeClr val="accent1"/>
-          </a:effectRef>
-          <a:fontRef idx="minor">
-            <a:schemeClr val="lt1"/>
-          </a:fontRef>
-        </p:style>
-        <p:txBody>
-          <a:bodyPr rtlCol="0" anchor="ctr"/>
-          <a:lstStyle/>
-          <a:p>
-            <a:pPr algn="ctr"/>
-            <a:r>
-              <a:rPr lang="en-US">
-                <a:latin typeface="Helvetica" pitchFamily="2" charset="0"/>
-              </a:rPr>
-              <a:t>2</a:t>
-            </a:r>
-          </a:p>
-        </p:txBody>
-      </p:sp>
-      <p:sp>
-        <p:nvSpPr>
-          <p:cNvPr id="12" name="Oval 11">
-            <a:extLst>
-              <a:ext uri="{FF2B5EF4-FFF2-40B4-BE49-F238E27FC236}">
-                <a16:creationId xmlns:a16="http://schemas.microsoft.com/office/drawing/2014/main" id="{B755A2CE-36C7-7C3A-E3EF-94EBD356F86C}"/>
-              </a:ext>
-            </a:extLst>
-          </p:cNvPr>
-          <p:cNvSpPr>
-            <a:spLocks noChangeAspect="1"/>
-          </p:cNvSpPr>
-          <p:nvPr/>
-        </p:nvSpPr>
-        <p:spPr>
-          <a:xfrm>
-            <a:off x="6958815" y="1837130"/>
-            <a:ext cx="720000" cy="686283"/>
-          </a:xfrm>
-          <a:prstGeom prst="ellipse">
-            <a:avLst/>
-          </a:prstGeom>
-          <a:solidFill>
-            <a:srgbClr val="13A89E"/>
-          </a:solidFill>
-          <a:ln>
-            <a:noFill/>
-          </a:ln>
-        </p:spPr>
-        <p:style>
-          <a:lnRef idx="2">
-            <a:schemeClr val="accent1">
-              <a:shade val="15000"/>
-            </a:schemeClr>
-          </a:lnRef>
-          <a:fillRef idx="1">
-            <a:schemeClr val="accent1"/>
-          </a:fillRef>
-          <a:effectRef idx="0">
-            <a:schemeClr val="accent1"/>
-          </a:effectRef>
-          <a:fontRef idx="minor">
-            <a:schemeClr val="lt1"/>
-          </a:fontRef>
-        </p:style>
-        <p:txBody>
-          <a:bodyPr rtlCol="0" anchor="ctr"/>
-          <a:lstStyle/>
-          <a:p>
-            <a:pPr algn="ctr"/>
-            <a:r>
-              <a:rPr lang="en-US">
-                <a:latin typeface="Helvetica" pitchFamily="2" charset="0"/>
-              </a:rPr>
-              <a:t>3</a:t>
-            </a:r>
-          </a:p>
-        </p:txBody>
-      </p:sp>
-      <p:pic>
-        <p:nvPicPr>
-          <p:cNvPr id="14" name="Graphic 13" descr="Clipboard with solid fill">
-            <a:extLst>
-              <a:ext uri="{FF2B5EF4-FFF2-40B4-BE49-F238E27FC236}">
-                <a16:creationId xmlns:a16="http://schemas.microsoft.com/office/drawing/2014/main" id="{060FE140-39DA-6155-D659-8C3C8FEDECAE}"/>
-              </a:ext>
-            </a:extLst>
-          </p:cNvPr>
-          <p:cNvPicPr>
-            <a:picLocks noChangeAspect="1"/>
-          </p:cNvPicPr>
-          <p:nvPr/>
-        </p:nvPicPr>
-        <p:blipFill>
-          <a:blip r:embed="rId2">
-            <a:extLst>
-              <a:ext uri="{96DAC541-7B7A-43D3-8B79-37D633B846F1}">
-                <asvg:svgBlip xmlns:asvg="http://schemas.microsoft.com/office/drawing/2016/SVG/main" r:embed="rId3"/>
-              </a:ext>
-            </a:extLst>
-          </a:blip>
-          <a:stretch>
-            <a:fillRect/>
-          </a:stretch>
-        </p:blipFill>
-        <p:spPr>
-          <a:xfrm>
-            <a:off x="3555521" y="2880306"/>
-            <a:ext cx="1866473" cy="1866473"/>
-          </a:xfrm>
-          <a:prstGeom prst="rect">
-            <a:avLst/>
-          </a:prstGeom>
-        </p:spPr>
-      </p:pic>
-      <p:pic>
-        <p:nvPicPr>
-          <p:cNvPr id="1026" name="Picture 2" descr="Co-curricular record approval logo">
-            <a:extLst>
-              <a:ext uri="{FF2B5EF4-FFF2-40B4-BE49-F238E27FC236}">
-                <a16:creationId xmlns:a16="http://schemas.microsoft.com/office/drawing/2014/main" id="{B21C3CDD-B849-1F66-A5B6-38B78BCAB0B1}"/>
-              </a:ext>
-            </a:extLst>
-          </p:cNvPr>
-          <p:cNvPicPr>
-            <a:picLocks noChangeAspect="1" noChangeArrowheads="1"/>
-          </p:cNvPicPr>
-          <p:nvPr/>
-        </p:nvPicPr>
-        <p:blipFill>
-          <a:blip r:embed="rId4">
-            <a:extLst>
-              <a:ext uri="{28A0092B-C50C-407E-A947-70E740481C1C}">
-                <a14:useLocalDpi xmlns:a14="http://schemas.microsoft.com/office/drawing/2010/main" val="0"/>
-              </a:ext>
-            </a:extLst>
-          </a:blip>
-          <a:srcRect/>
-          <a:stretch>
-            <a:fillRect/>
-          </a:stretch>
-        </p:blipFill>
-        <p:spPr bwMode="auto">
-          <a:xfrm>
-            <a:off x="6302815" y="3051542"/>
-            <a:ext cx="2032000" cy="1524000"/>
-          </a:xfrm>
-          <a:prstGeom prst="rect">
-            <a:avLst/>
-          </a:prstGeom>
-          <a:noFill/>
-          <a:extLst>
-            <a:ext uri="{909E8E84-426E-40DD-AFC4-6F175D3DCCD1}">
-              <a14:hiddenFill xmlns:a14="http://schemas.microsoft.com/office/drawing/2010/main">
-                <a:solidFill>
-                  <a:srgbClr val="FFFFFF"/>
-                </a:solidFill>
-              </a14:hiddenFill>
-            </a:ext>
-          </a:extLst>
-        </p:spPr>
-      </p:pic>
-      <p:pic>
-        <p:nvPicPr>
-          <p:cNvPr id="3" name="Picture 2" descr="A qr code with a few squares&#10;&#10;AI-generated content may be incorrect.">
-            <a:extLst>
-              <a:ext uri="{FF2B5EF4-FFF2-40B4-BE49-F238E27FC236}">
-                <a16:creationId xmlns:a16="http://schemas.microsoft.com/office/drawing/2014/main" id="{4F7CE10B-BAB8-9D62-B2E5-57F952CB5102}"/>
-              </a:ext>
-            </a:extLst>
-          </p:cNvPr>
-          <p:cNvPicPr>
-            <a:picLocks noChangeAspect="1"/>
-          </p:cNvPicPr>
-          <p:nvPr/>
-        </p:nvPicPr>
-        <p:blipFill>
-          <a:blip r:embed="rId5"/>
-          <a:stretch>
-            <a:fillRect/>
-          </a:stretch>
-        </p:blipFill>
-        <p:spPr>
-          <a:xfrm>
-            <a:off x="498653" y="2671413"/>
-            <a:ext cx="2278204" cy="2278204"/>
-          </a:xfrm>
-          <a:prstGeom prst="rect">
-            <a:avLst/>
-          </a:prstGeom>
-        </p:spPr>
-      </p:pic>
     </p:spTree>
     <p:extLst>
       <p:ext uri="{BB962C8B-B14F-4D97-AF65-F5344CB8AC3E}">
